--- a/courseware/202609_ADS_W03_Computer_Principles_1.pptx
+++ b/courseware/202609_ADS_W03_Computer_Principles_1.pptx
@@ -13380,7 +13380,27 @@
                 <a:latin typeface="Segoe UI"/>
                 <a:ea typeface="微软雅黑"/>
               </a:rPr>
-              <a:t>永远不要用 `==` 比较</a:t>
+              <a:t>永远不要用 </a:t>
+            </a:r>
+            <a:r>
+              <a:rPr sz="1879" b="1" i="0">
+                <a:solidFill>
+                  <a:srgbClr val="12395B"/>
+                </a:solidFill>
+                <a:latin typeface="Consolas"/>
+                <a:ea typeface="Consolas"/>
+              </a:rPr>
+              <a:t>==</a:t>
+            </a:r>
+            <a:r>
+              <a:rPr sz="2000" b="1" i="0">
+                <a:solidFill>
+                  <a:srgbClr val="12395B"/>
+                </a:solidFill>
+                <a:latin typeface="Segoe UI"/>
+                <a:ea typeface="微软雅黑"/>
+              </a:rPr>
+              <a:t> 比较</a:t>
             </a:r>
           </a:p>
           <a:p>
